--- a/Documentation/Slides/Weekly-Report-06-22-2026.pptx
+++ b/Documentation/Slides/Weekly-Report-06-22-2026.pptx
@@ -14151,7 +14151,7 @@
               <a:buChar char="•"/>
             </a:pPr>
             <a:r>
-              <a:rPr lang="en-US" sz="1800"/>
+              <a:rPr lang="en-US" sz="1800" dirty="0"/>
               <a:t>4 Micro USB connectors</a:t>
             </a:r>
           </a:p>
@@ -14161,15 +14161,15 @@
               <a:buChar char="•"/>
             </a:pPr>
             <a:r>
-              <a:rPr lang="en-US" sz="1800"/>
+              <a:rPr lang="en-US" sz="1800" dirty="0"/>
               <a:t>3 Connectors (JST to single female </a:t>
             </a:r>
             <a:r>
-              <a:rPr lang="en-US" sz="1800" err="1"/>
+              <a:rPr lang="en-US" sz="1800" dirty="0" err="1"/>
               <a:t>dupont</a:t>
             </a:r>
             <a:r>
-              <a:rPr lang="en-US" sz="1800"/>
+              <a:rPr lang="en-US" sz="1800" dirty="0"/>
               <a:t>)</a:t>
             </a:r>
           </a:p>
@@ -14650,6 +14650,16 @@
             </a:pPr>
             <a:r>
               <a:rPr lang="en-US" dirty="0"/>
+              <a:t>12 hours</a:t>
+            </a:r>
+          </a:p>
+          <a:p>
+            <a:pPr marL="971550" lvl="2" indent="-285750">
+              <a:buFont typeface="Arial" panose="020B0604020202020204" pitchFamily="34" charset="0"/>
+              <a:buChar char="•"/>
+            </a:pPr>
+            <a:r>
+              <a:rPr lang="en-US" dirty="0"/>
               <a:t>Etc.</a:t>
             </a:r>
           </a:p>
@@ -14762,7 +14772,7 @@
         </p:blipFill>
         <p:spPr>
           <a:xfrm>
-            <a:off x="821266" y="4223170"/>
+            <a:off x="723294" y="4460209"/>
             <a:ext cx="5888717" cy="1834849"/>
           </a:xfrm>
           <a:prstGeom prst="rect">
@@ -15098,11 +15108,38 @@
             </a:pPr>
             <a:r>
               <a:rPr lang="en-US" dirty="0"/>
-              <a:t>Make </a:t>
+              <a:t>Make final changes to PCB</a:t>
+            </a:r>
+          </a:p>
+          <a:p>
+            <a:pPr marL="285750" indent="-285750">
+              <a:buFont typeface="Arial" panose="020B0604020202020204" pitchFamily="34" charset="0"/>
+              <a:buChar char="•"/>
+            </a:pPr>
+            <a:endParaRPr lang="en-US" dirty="0"/>
+          </a:p>
+          <a:p>
+            <a:pPr marL="285750" indent="-285750">
+              <a:buFont typeface="Arial" panose="020B0604020202020204" pitchFamily="34" charset="0"/>
+              <a:buChar char="•"/>
+            </a:pPr>
+            <a:r>
+              <a:rPr lang="en-US" dirty="0"/>
+              <a:t>Test Force Sensor with PCB; tapping</a:t>
+            </a:r>
+          </a:p>
+          <a:p>
+            <a:pPr marL="285750" indent="-285750">
+              <a:buFont typeface="Arial" panose="020B0604020202020204" pitchFamily="34" charset="0"/>
+              <a:buChar char="•"/>
+            </a:pPr>
+            <a:r>
+              <a:rPr lang="en-US" dirty="0"/>
+              <a:t>Shorten cable </a:t>
             </a:r>
             <a:r>
               <a:rPr lang="en-US"/>
-              <a:t>final changes to PCB</a:t>
+              <a:t>if needed?</a:t>
             </a:r>
             <a:endParaRPr lang="en-US" dirty="0"/>
           </a:p>
@@ -15900,15 +15937,6 @@
 </file>
 
 <file path=customXml/item2.xml><?xml version="1.0" encoding="utf-8"?>
-<?mso-contentType ?>
-<FormTemplates xmlns="http://schemas.microsoft.com/sharepoint/v3/contenttype/forms">
-  <Display>DocumentLibraryForm</Display>
-  <Edit>DocumentLibraryForm</Edit>
-  <New>DocumentLibraryForm</New>
-</FormTemplates>
-</file>
-
-<file path=customXml/item3.xml><?xml version="1.0" encoding="utf-8"?>
 <ct:contentTypeSchema xmlns:ct="http://schemas.microsoft.com/office/2006/metadata/contentType" xmlns:ma="http://schemas.microsoft.com/office/2006/metadata/properties/metaAttributes" ct:_="" ma:_="" ma:contentTypeName="Document" ma:contentTypeID="0x01010054E202481DC1CB46AA011D949D311478" ma:contentTypeVersion="13" ma:contentTypeDescription="Create a new document." ma:contentTypeScope="" ma:versionID="309c718596e4092f54ce9aa93358bb8d">
   <xsd:schema xmlns:xsd="http://www.w3.org/2001/XMLSchema" xmlns:xs="http://www.w3.org/2001/XMLSchema" xmlns:p="http://schemas.microsoft.com/office/2006/metadata/properties" xmlns:ns2="37af3f4b-4b66-46f9-8456-831d9bc3e737" xmlns:ns3="d6656b4d-3fa0-4709-acfb-d5e813445d1e" targetNamespace="http://schemas.microsoft.com/office/2006/metadata/properties" ma:root="true" ma:fieldsID="0c34f3e70276db9d2471c2526b8de3df" ns2:_="" ns3:_="">
     <xsd:import namespace="37af3f4b-4b66-46f9-8456-831d9bc3e737"/>
@@ -16131,32 +16159,33 @@
 </ct:contentTypeSchema>
 </file>
 
+<file path=customXml/item3.xml><?xml version="1.0" encoding="utf-8"?>
+<?mso-contentType ?>
+<FormTemplates xmlns="http://schemas.microsoft.com/sharepoint/v3/contenttype/forms">
+  <Display>DocumentLibraryForm</Display>
+  <Edit>DocumentLibraryForm</Edit>
+  <New>DocumentLibraryForm</New>
+</FormTemplates>
+</file>
+
 <file path=customXml/itemProps1.xml><?xml version="1.0" encoding="utf-8"?>
 <ds:datastoreItem xmlns:ds="http://schemas.openxmlformats.org/officeDocument/2006/customXml" ds:itemID="{21DE0D6C-581B-4814-98E7-EF172D5D46A1}">
   <ds:schemaRefs>
+    <ds:schemaRef ds:uri="http://schemas.microsoft.com/office/2006/documentManagement/types"/>
+    <ds:schemaRef ds:uri="http://purl.org/dc/dcmitype/"/>
+    <ds:schemaRef ds:uri="http://www.w3.org/XML/1998/namespace"/>
+    <ds:schemaRef ds:uri="http://purl.org/dc/terms/"/>
+    <ds:schemaRef ds:uri="http://schemas.openxmlformats.org/package/2006/metadata/core-properties"/>
     <ds:schemaRef ds:uri="37af3f4b-4b66-46f9-8456-831d9bc3e737"/>
-    <ds:schemaRef ds:uri="http://schemas.openxmlformats.org/package/2006/metadata/core-properties"/>
-    <ds:schemaRef ds:uri="http://purl.org/dc/terms/"/>
-    <ds:schemaRef ds:uri="http://purl.org/dc/dcmitype/"/>
+    <ds:schemaRef ds:uri="http://purl.org/dc/elements/1.1/"/>
     <ds:schemaRef ds:uri="http://schemas.microsoft.com/office/infopath/2007/PartnerControls"/>
-    <ds:schemaRef ds:uri="http://schemas.microsoft.com/office/2006/documentManagement/types"/>
-    <ds:schemaRef ds:uri="http://purl.org/dc/elements/1.1/"/>
     <ds:schemaRef ds:uri="d6656b4d-3fa0-4709-acfb-d5e813445d1e"/>
     <ds:schemaRef ds:uri="http://schemas.microsoft.com/office/2006/metadata/properties"/>
-    <ds:schemaRef ds:uri="http://www.w3.org/XML/1998/namespace"/>
   </ds:schemaRefs>
 </ds:datastoreItem>
 </file>
 
 <file path=customXml/itemProps2.xml><?xml version="1.0" encoding="utf-8"?>
-<ds:datastoreItem xmlns:ds="http://schemas.openxmlformats.org/officeDocument/2006/customXml" ds:itemID="{F5B64EEB-1B4A-4920-AA44-E234D7D487D1}">
-  <ds:schemaRefs>
-    <ds:schemaRef ds:uri="http://schemas.microsoft.com/sharepoint/v3/contenttype/forms"/>
-  </ds:schemaRefs>
-</ds:datastoreItem>
-</file>
-
-<file path=customXml/itemProps3.xml><?xml version="1.0" encoding="utf-8"?>
 <ds:datastoreItem xmlns:ds="http://schemas.openxmlformats.org/officeDocument/2006/customXml" ds:itemID="{64D795B0-FAA0-424A-9B96-7691ED1EF26B}">
   <ds:schemaRefs>
     <ds:schemaRef ds:uri="http://schemas.microsoft.com/office/2006/metadata/contentType"/>
@@ -16173,4 +16202,12 @@
     <ds:schemaRef ds:uri="http://schemas.microsoft.com/internal/obd"/>
   </ds:schemaRefs>
 </ds:datastoreItem>
+</file>
+
+<file path=customXml/itemProps3.xml><?xml version="1.0" encoding="utf-8"?>
+<ds:datastoreItem xmlns:ds="http://schemas.openxmlformats.org/officeDocument/2006/customXml" ds:itemID="{F5B64EEB-1B4A-4920-AA44-E234D7D487D1}">
+  <ds:schemaRefs>
+    <ds:schemaRef ds:uri="http://schemas.microsoft.com/sharepoint/v3/contenttype/forms"/>
+  </ds:schemaRefs>
+</ds:datastoreItem>
 </file>